--- a/Analisis_Clientes_Bicis.pptx
+++ b/Analisis_Clientes_Bicis.pptx
@@ -2939,13 +2939,11 @@
           <a:bodyPr wrap="square" rtlCol="0" anchor="ctr"/>
           <a:lstStyle/>
           <a:p>
-            <a:pPr marL="0" indent="0" algn="ctr">
-              <a:buNone/>
-            </a:pPr>
-            <a:r>
-              <a:rPr lang="en-US" sz="2200" dirty="0">
-                <a:solidFill>
-                  <a:srgbClr val="000000"/>
+            <a:pPr algn="ctr"/>
+            <a:r>
+              <a:rPr lang="en-US" sz="1300" b="1" dirty="0" smtClean="0">
+                <a:solidFill>
+                  <a:srgbClr val="FFFFFF"/>
                 </a:solidFill>
               </a:rPr>
               <a:t>🏆</a:t>
@@ -3265,14 +3263,6 @@
             <a:pPr marL="0" indent="0" algn="ctr">
               <a:buNone/>
             </a:pPr>
-            <a:r>
-              <a:rPr lang="en-US" sz="2200" dirty="0">
-                <a:solidFill>
-                  <a:srgbClr val="000000"/>
-                </a:solidFill>
-              </a:rPr>
-              <a:t>🚀</a:t>
-            </a:r>
             <a:endParaRPr lang="en-US" sz="2200" dirty="0"/>
           </a:p>
         </p:txBody>
@@ -3573,29 +3563,33 @@
         <p:spPr>
           <a:xfrm>
             <a:off x="457200" y="3703320"/>
-            <a:ext cx="457200" cy="457200"/>
-          </a:xfrm>
-          <a:prstGeom prst="rect">
-            <a:avLst/>
-          </a:prstGeom>
-          <a:noFill/>
-          <a:ln/>
-        </p:spPr>
-        <p:txBody>
-          <a:bodyPr wrap="square" rtlCol="0" anchor="ctr"/>
-          <a:lstStyle/>
+            <a:ext cx="548640" cy="886968"/>
+          </a:xfrm>
+          <a:prstGeom prst="rect">
+            <a:avLst/>
+          </a:prstGeom>
+          <a:noFill/>
+          <a:ln/>
+        </p:spPr>
+        <p:txBody>
+          <a:bodyPr wrap="square" rtlCol="0" anchor="ctr"/>
+          <a:lstStyle/>
+          <a:p>
+            <a:pPr algn="ctr"/>
+            <a:r>
+              <a:rPr lang="en-US" sz="1300" b="1" dirty="0" smtClean="0">
+                <a:solidFill>
+                  <a:srgbClr val="FFFFFF"/>
+                </a:solidFill>
+              </a:rPr>
+              <a:t>⚡</a:t>
+            </a:r>
+            <a:endParaRPr lang="en-US" sz="2200" dirty="0" smtClean="0"/>
+          </a:p>
           <a:p>
             <a:pPr marL="0" indent="0" algn="ctr">
               <a:buNone/>
             </a:pPr>
-            <a:r>
-              <a:rPr lang="en-US" sz="2200" dirty="0">
-                <a:solidFill>
-                  <a:srgbClr val="000000"/>
-                </a:solidFill>
-              </a:rPr>
-              <a:t>⚡</a:t>
-            </a:r>
             <a:endParaRPr lang="en-US" sz="2200" dirty="0"/>
           </a:p>
         </p:txBody>
@@ -3827,6 +3821,66 @@
               <a:t>Tasa de rechazo del 60%. Los que viven cerca prefieren caminar; los que viven lejos ven el esfuerzo físico como barrera. Solución: bici eléctrica.</a:t>
             </a:r>
             <a:endParaRPr lang="en-US" sz="950" dirty="0"/>
+          </a:p>
+        </p:txBody>
+      </p:sp>
+      <p:sp>
+        <p:nvSpPr>
+          <p:cNvPr id="34" name="Text 4"/>
+          <p:cNvSpPr/>
+          <p:nvPr/>
+        </p:nvSpPr>
+        <p:spPr>
+          <a:xfrm>
+            <a:off x="457200" y="2359152"/>
+            <a:ext cx="457200" cy="457200"/>
+          </a:xfrm>
+          <a:prstGeom prst="rect">
+            <a:avLst/>
+          </a:prstGeom>
+          <a:noFill/>
+          <a:ln/>
+        </p:spPr>
+        <p:txBody>
+          <a:bodyPr wrap="square" rtlCol="0" anchor="ctr"/>
+          <a:lstStyle/>
+          <a:p>
+            <a:pPr algn="ctr"/>
+            <a:endParaRPr lang="en-US" sz="2200" dirty="0"/>
+          </a:p>
+        </p:txBody>
+      </p:sp>
+      <p:sp>
+        <p:nvSpPr>
+          <p:cNvPr id="35" name="Text 24"/>
+          <p:cNvSpPr/>
+          <p:nvPr/>
+        </p:nvSpPr>
+        <p:spPr>
+          <a:xfrm>
+            <a:off x="457200" y="2372868"/>
+            <a:ext cx="457200" cy="397764"/>
+          </a:xfrm>
+          <a:prstGeom prst="rect">
+            <a:avLst/>
+          </a:prstGeom>
+          <a:noFill/>
+          <a:ln/>
+        </p:spPr>
+        <p:txBody>
+          <a:bodyPr wrap="square" rtlCol="0" anchor="ctr"/>
+          <a:lstStyle/>
+          <a:p>
+            <a:pPr algn="ctr"/>
+            <a:r>
+              <a:rPr lang="en-US" sz="1300" b="1" dirty="0" smtClean="0">
+                <a:solidFill>
+                  <a:srgbClr val="FFFFFF"/>
+                </a:solidFill>
+              </a:rPr>
+              <a:t>🚀</a:t>
+            </a:r>
+            <a:endParaRPr lang="en-US" sz="2200" dirty="0"/>
           </a:p>
         </p:txBody>
       </p:sp>
